--- a/alumnos/soluciones/f3_comandos/ficheros/informe_semanal.pptx
+++ b/alumnos/soluciones/f3_comandos/ficheros/informe_semanal.pptx
@@ -3092,28 +3092,20 @@
       <p:grpSpPr/>
       <p:sp>
         <p:nvSpPr>
-          <p:cNvPr id="2" name="TextBox 1"/>
-          <p:cNvSpPr txBox="1"/>
-          <p:nvPr/>
-        </p:nvSpPr>
-        <p:spPr>
-          <a:xfrm>
-            <a:off x="914400" y="2194560"/>
-            <a:ext cx="10332720" cy="1280160"/>
-          </a:xfrm>
-          <a:prstGeom prst="rect">
-            <a:avLst/>
-          </a:prstGeom>
-          <a:noFill/>
-        </p:spPr>
-        <p:txBody>
-          <a:bodyPr wrap="square">
-            <a:spAutoFit/>
-          </a:bodyPr>
-          <a:lstStyle/>
-          <a:p>
-            <a:r>
-              <a:rPr sz="4400" b="1"/>
+          <p:cNvPr id="2" name="Title 1"/>
+          <p:cNvSpPr>
+            <a:spLocks noGrp="1"/>
+          </p:cNvSpPr>
+          <p:nvPr>
+            <p:ph type="ctrTitle"/>
+          </p:nvPr>
+        </p:nvSpPr>
+        <p:spPr/>
+        <p:txBody>
+          <a:bodyPr/>
+          <a:lstStyle/>
+          <a:p>
+            <a:r>
               <a:t>Informe semanal de ventas</a:t>
             </a:r>
           </a:p>
@@ -3121,29 +3113,21 @@
       </p:sp>
       <p:sp>
         <p:nvSpPr>
-          <p:cNvPr id="3" name="TextBox 2"/>
-          <p:cNvSpPr txBox="1"/>
-          <p:nvPr/>
-        </p:nvSpPr>
-        <p:spPr>
-          <a:xfrm>
-            <a:off x="914400" y="3566160"/>
-            <a:ext cx="10332720" cy="731520"/>
-          </a:xfrm>
-          <a:prstGeom prst="rect">
-            <a:avLst/>
-          </a:prstGeom>
-          <a:noFill/>
-        </p:spPr>
-        <p:txBody>
-          <a:bodyPr wrap="square">
-            <a:spAutoFit/>
-          </a:bodyPr>
-          <a:lstStyle/>
-          <a:p>
-            <a:r>
-              <a:rPr sz="2800" b="0"/>
-              <a:t>Último mes del CSV: junio</a:t>
+          <p:cNvPr id="3" name="Subtitle 2"/>
+          <p:cNvSpPr>
+            <a:spLocks noGrp="1"/>
+          </p:cNvSpPr>
+          <p:nvPr>
+            <p:ph type="subTitle" idx="1"/>
+          </p:nvPr>
+        </p:nvSpPr>
+        <p:spPr/>
+        <p:txBody>
+          <a:bodyPr/>
+          <a:lstStyle/>
+          <a:p>
+            <a:r>
+              <a:t>Junio</a:t>
             </a:r>
           </a:p>
         </p:txBody>
@@ -3168,14 +3152,35 @@
       <p:grpSpPr/>
       <p:sp>
         <p:nvSpPr>
-          <p:cNvPr id="2" name="TextBox 1"/>
+          <p:cNvPr id="2" name="Title 1"/>
+          <p:cNvSpPr>
+            <a:spLocks noGrp="1"/>
+          </p:cNvSpPr>
+          <p:nvPr>
+            <p:ph type="title"/>
+          </p:nvPr>
+        </p:nvSpPr>
+        <p:spPr/>
+        <p:txBody>
+          <a:bodyPr/>
+          <a:lstStyle/>
+          <a:p>
+            <a:r>
+              <a:t>Totales del periodo</a:t>
+            </a:r>
+          </a:p>
+        </p:txBody>
+      </p:sp>
+      <p:sp>
+        <p:nvSpPr>
+          <p:cNvPr id="3" name="TextBox 2"/>
           <p:cNvSpPr txBox="1"/>
           <p:nvPr/>
         </p:nvSpPr>
         <p:spPr>
           <a:xfrm>
-            <a:off x="640080" y="457200"/>
-            <a:ext cx="10881360" cy="914400"/>
+            <a:off x="914400" y="1828800"/>
+            <a:ext cx="7315200" cy="2743200"/>
           </a:xfrm>
           <a:prstGeom prst="rect">
             <a:avLst/>
@@ -3183,130 +3188,40 @@
           <a:noFill/>
         </p:spPr>
         <p:txBody>
-          <a:bodyPr wrap="square">
+          <a:bodyPr wrap="none">
             <a:spAutoFit/>
           </a:bodyPr>
           <a:lstStyle/>
           <a:p>
-            <a:r>
-              <a:rPr sz="3400" b="1"/>
-              <a:t>Total por categoría y total general</a:t>
-            </a:r>
-          </a:p>
-        </p:txBody>
-      </p:sp>
-      <p:sp>
-        <p:nvSpPr>
-          <p:cNvPr id="3" name="TextBox 2"/>
-          <p:cNvSpPr txBox="1"/>
-          <p:nvPr/>
-        </p:nvSpPr>
-        <p:spPr>
-          <a:xfrm>
-            <a:off x="1097280" y="1828800"/>
-            <a:ext cx="9601200" cy="731520"/>
-          </a:xfrm>
-          <a:prstGeom prst="rect">
-            <a:avLst/>
-          </a:prstGeom>
-          <a:noFill/>
-        </p:spPr>
-        <p:txBody>
-          <a:bodyPr wrap="square">
-            <a:spAutoFit/>
-          </a:bodyPr>
-          <a:lstStyle/>
-          <a:p>
-            <a:r>
-              <a:rPr sz="3000" b="0"/>
-              <a:t>hogar: 29.800 €</a:t>
-            </a:r>
-          </a:p>
-        </p:txBody>
-      </p:sp>
-      <p:sp>
-        <p:nvSpPr>
-          <p:cNvPr id="4" name="TextBox 3"/>
-          <p:cNvSpPr txBox="1"/>
-          <p:nvPr/>
-        </p:nvSpPr>
-        <p:spPr>
-          <a:xfrm>
-            <a:off x="1097280" y="2743200"/>
-            <a:ext cx="9601200" cy="731520"/>
-          </a:xfrm>
-          <a:prstGeom prst="rect">
-            <a:avLst/>
-          </a:prstGeom>
-          <a:noFill/>
-        </p:spPr>
-        <p:txBody>
-          <a:bodyPr wrap="square">
-            <a:spAutoFit/>
-          </a:bodyPr>
-          <a:lstStyle/>
-          <a:p>
-            <a:r>
-              <a:rPr sz="3000" b="0"/>
-              <a:t>textil: 18.700 €</a:t>
-            </a:r>
-          </a:p>
-        </p:txBody>
-      </p:sp>
-      <p:sp>
-        <p:nvSpPr>
-          <p:cNvPr id="5" name="TextBox 4"/>
-          <p:cNvSpPr txBox="1"/>
-          <p:nvPr/>
-        </p:nvSpPr>
-        <p:spPr>
-          <a:xfrm>
-            <a:off x="1097280" y="3657600"/>
-            <a:ext cx="9601200" cy="731520"/>
-          </a:xfrm>
-          <a:prstGeom prst="rect">
-            <a:avLst/>
-          </a:prstGeom>
-          <a:noFill/>
-        </p:spPr>
-        <p:txBody>
-          <a:bodyPr wrap="square">
-            <a:spAutoFit/>
-          </a:bodyPr>
-          <a:lstStyle/>
-          <a:p>
-            <a:r>
-              <a:rPr sz="3000" b="0"/>
-              <a:t>bazar: 14.000 €</a:t>
-            </a:r>
-          </a:p>
-        </p:txBody>
-      </p:sp>
-      <p:sp>
-        <p:nvSpPr>
-          <p:cNvPr id="6" name="TextBox 5"/>
-          <p:cNvSpPr txBox="1"/>
-          <p:nvPr/>
-        </p:nvSpPr>
-        <p:spPr>
-          <a:xfrm>
-            <a:off x="1097280" y="4846320"/>
-            <a:ext cx="9601200" cy="914400"/>
-          </a:xfrm>
-          <a:prstGeom prst="rect">
-            <a:avLst/>
-          </a:prstGeom>
-          <a:noFill/>
-        </p:spPr>
-        <p:txBody>
-          <a:bodyPr wrap="square">
-            <a:spAutoFit/>
-          </a:bodyPr>
-          <a:lstStyle/>
-          <a:p>
-            <a:r>
-              <a:rPr sz="3400" b="1"/>
-              <a:t>TOTAL GENERAL: 62.500 €</a:t>
+            <a:pPr>
+              <a:defRPr sz="2400"/>
+            </a:pPr>
+            <a:r>
+              <a:t>Hogar: 29.800 €</a:t>
+            </a:r>
+          </a:p>
+          <a:p>
+            <a:pPr>
+              <a:defRPr sz="2400"/>
+            </a:pPr>
+            <a:r>
+              <a:t>Textil: 18.700 €</a:t>
+            </a:r>
+          </a:p>
+          <a:p>
+            <a:pPr>
+              <a:defRPr sz="2400"/>
+            </a:pPr>
+            <a:r>
+              <a:t>Bazar: 14.000 €</a:t>
+            </a:r>
+          </a:p>
+          <a:p>
+            <a:pPr>
+              <a:defRPr sz="2400"/>
+            </a:pPr>
+            <a:r>
+              <a:t>Total general: 62.500 €</a:t>
             </a:r>
           </a:p>
         </p:txBody>
@@ -3331,14 +3246,35 @@
       <p:grpSpPr/>
       <p:sp>
         <p:nvSpPr>
-          <p:cNvPr id="2" name="TextBox 1"/>
+          <p:cNvPr id="2" name="Title 1"/>
+          <p:cNvSpPr>
+            <a:spLocks noGrp="1"/>
+          </p:cNvSpPr>
+          <p:nvPr>
+            <p:ph type="title"/>
+          </p:nvPr>
+        </p:nvSpPr>
+        <p:spPr/>
+        <p:txBody>
+          <a:bodyPr/>
+          <a:lstStyle/>
+          <a:p>
+            <a:r>
+              <a:t>Tendencia</a:t>
+            </a:r>
+          </a:p>
+        </p:txBody>
+      </p:sp>
+      <p:sp>
+        <p:nvSpPr>
+          <p:cNvPr id="3" name="TextBox 2"/>
           <p:cNvSpPr txBox="1"/>
           <p:nvPr/>
         </p:nvSpPr>
         <p:spPr>
           <a:xfrm>
-            <a:off x="640080" y="457200"/>
-            <a:ext cx="10881360" cy="914400"/>
+            <a:off x="914400" y="1828800"/>
+            <a:ext cx="8229600" cy="2743200"/>
           </a:xfrm>
           <a:prstGeom prst="rect">
             <a:avLst/>
@@ -3346,101 +3282,32 @@
           <a:noFill/>
         </p:spPr>
         <p:txBody>
-          <a:bodyPr wrap="square">
+          <a:bodyPr wrap="none">
             <a:spAutoFit/>
           </a:bodyPr>
           <a:lstStyle/>
           <a:p>
-            <a:r>
-              <a:rPr sz="3400" b="1"/>
-              <a:t>Tendencia del total mensual</a:t>
-            </a:r>
-          </a:p>
-        </p:txBody>
-      </p:sp>
-      <p:sp>
-        <p:nvSpPr>
-          <p:cNvPr id="3" name="TextBox 2"/>
-          <p:cNvSpPr txBox="1"/>
-          <p:nvPr/>
-        </p:nvSpPr>
-        <p:spPr>
-          <a:xfrm>
-            <a:off x="1097280" y="2011680"/>
-            <a:ext cx="9966960" cy="731520"/>
-          </a:xfrm>
-          <a:prstGeom prst="rect">
-            <a:avLst/>
-          </a:prstGeom>
-          <a:noFill/>
-        </p:spPr>
-        <p:txBody>
-          <a:bodyPr wrap="square">
-            <a:spAutoFit/>
-          </a:bodyPr>
-          <a:lstStyle/>
-          <a:p>
-            <a:r>
-              <a:rPr sz="3000" b="0"/>
-              <a:t>enero (enero): 8.900 €</a:t>
-            </a:r>
-          </a:p>
-        </p:txBody>
-      </p:sp>
-      <p:sp>
-        <p:nvSpPr>
-          <p:cNvPr id="4" name="TextBox 3"/>
-          <p:cNvSpPr txBox="1"/>
-          <p:nvPr/>
-        </p:nvSpPr>
-        <p:spPr>
-          <a:xfrm>
-            <a:off x="1097280" y="2834640"/>
-            <a:ext cx="9966960" cy="731520"/>
-          </a:xfrm>
-          <a:prstGeom prst="rect">
-            <a:avLst/>
-          </a:prstGeom>
-          <a:noFill/>
-        </p:spPr>
-        <p:txBody>
-          <a:bodyPr wrap="square">
-            <a:spAutoFit/>
-          </a:bodyPr>
-          <a:lstStyle/>
-          <a:p>
-            <a:r>
-              <a:rPr sz="3000" b="0"/>
-              <a:t>junio: 12.800 €</a:t>
-            </a:r>
-          </a:p>
-        </p:txBody>
-      </p:sp>
-      <p:sp>
-        <p:nvSpPr>
-          <p:cNvPr id="5" name="TextBox 4"/>
-          <p:cNvSpPr txBox="1"/>
-          <p:nvPr/>
-        </p:nvSpPr>
-        <p:spPr>
-          <a:xfrm>
-            <a:off x="1097280" y="3840480"/>
-            <a:ext cx="9966960" cy="914400"/>
-          </a:xfrm>
-          <a:prstGeom prst="rect">
-            <a:avLst/>
-          </a:prstGeom>
-          <a:noFill/>
-        </p:spPr>
-        <p:txBody>
-          <a:bodyPr wrap="square">
-            <a:spAutoFit/>
-          </a:bodyPr>
-          <a:lstStyle/>
-          <a:p>
-            <a:r>
-              <a:rPr sz="4000" b="1"/>
-              <a:t>Variación: +43.8 %</a:t>
+            <a:pPr>
+              <a:defRPr sz="2800"/>
+            </a:pPr>
+            <a:r>
+              <a:t>Enero: 8.900 €</a:t>
+            </a:r>
+          </a:p>
+          <a:p>
+            <a:pPr>
+              <a:defRPr sz="2800"/>
+            </a:pPr>
+            <a:r>
+              <a:t>Junio: 12.800 €</a:t>
+            </a:r>
+          </a:p>
+          <a:p>
+            <a:pPr>
+              <a:defRPr sz="2800"/>
+            </a:pPr>
+            <a:r>
+              <a:t>Variación: +43.82 %</a:t>
             </a:r>
           </a:p>
         </p:txBody>
